--- a/ppt/Datascience06-Jupyter.pptx
+++ b/ppt/Datascience06-Jupyter.pptx
@@ -3928,7 +3928,7 @@
             </a:r>
             <a:r>
               <a:rPr lang="fr-FR" dirty="0" err="1"/>
-              <a:t>jupyter</a:t>
+              <a:t>jupyterlab</a:t>
             </a:r>
             <a:endParaRPr lang="fr-FR" dirty="0"/>
           </a:p>
@@ -3954,8 +3954,13 @@
             </a:r>
             <a:r>
               <a:rPr lang="fr-FR" dirty="0"/>
-              <a:t> notebook</a:t>
-            </a:r>
+              <a:t> </a:t>
+            </a:r>
+            <a:r>
+              <a:rPr lang="fr-FR"/>
+              <a:t>lab</a:t>
+            </a:r>
+            <a:endParaRPr lang="fr-FR" dirty="0"/>
           </a:p>
           <a:p>
             <a:pPr lvl="1"/>

--- a/ppt/Datascience06-Jupyter.pptx
+++ b/ppt/Datascience06-Jupyter.pptx
@@ -3957,7 +3957,7 @@
               <a:t> </a:t>
             </a:r>
             <a:r>
-              <a:rPr lang="fr-FR"/>
+              <a:rPr lang="fr-FR" dirty="0" err="1"/>
               <a:t>lab</a:t>
             </a:r>
             <a:endParaRPr lang="fr-FR" dirty="0"/>
